--- a/Documentation/TravelEase PPT.pptx
+++ b/Documentation/TravelEase PPT.pptx
@@ -323,7 +323,7 @@
           <a:p>
             <a:fld id="{1D8BD707-D9CF-40AE-B4C6-C98DA3205C09}" type="datetimeFigureOut">
               <a:rPr lang="en-US"/>
-              <a:t>4/1/2026</a:t>
+              <a:t>4/6/2026</a:t>
             </a:fld>
             <a:endParaRPr lang="en-US"/>
           </a:p>
@@ -500,7 +500,7 @@
           <a:p>
             <a:fld id="{1D8BD707-D9CF-40AE-B4C6-C98DA3205C09}" type="datetimeFigureOut">
               <a:rPr lang="en-US"/>
-              <a:t>4/1/2026</a:t>
+              <a:t>4/6/2026</a:t>
             </a:fld>
             <a:endParaRPr lang="en-US"/>
           </a:p>
@@ -714,7 +714,7 @@
           <a:p>
             <a:fld id="{1D8BD707-D9CF-40AE-B4C6-C98DA3205C09}" type="datetimeFigureOut">
               <a:rPr lang="en-US"/>
-              <a:t>4/1/2026</a:t>
+              <a:t>4/6/2026</a:t>
             </a:fld>
             <a:endParaRPr lang="en-US"/>
           </a:p>
@@ -862,7 +862,7 @@
           <a:p>
             <a:fld id="{1D8BD707-D9CF-40AE-B4C6-C98DA3205C09}" type="datetimeFigureOut">
               <a:rPr lang="en-US"/>
-              <a:t>4/1/2026</a:t>
+              <a:t>4/6/2026</a:t>
             </a:fld>
             <a:endParaRPr lang="en-US"/>
           </a:p>
@@ -981,7 +981,7 @@
           <a:p>
             <a:fld id="{1D8BD707-D9CF-40AE-B4C6-C98DA3205C09}" type="datetimeFigureOut">
               <a:rPr lang="en-US"/>
-              <a:t>4/1/2026</a:t>
+              <a:t>4/6/2026</a:t>
             </a:fld>
             <a:endParaRPr lang="en-US"/>
           </a:p>
@@ -1206,7 +1206,7 @@
           <a:p>
             <a:fld id="{1D8BD707-D9CF-40AE-B4C6-C98DA3205C09}" type="datetimeFigureOut">
               <a:rPr lang="en-US"/>
-              <a:t>4/1/2026</a:t>
+              <a:t>4/6/2026</a:t>
             </a:fld>
             <a:endParaRPr lang="en-US"/>
           </a:p>
